--- a/documents/Mid-Progress-PPT.pptx
+++ b/documents/Mid-Progress-PPT.pptx
@@ -278,7 +278,7 @@
           <a:p>
             <a:fld id="{42668431-CD35-4516-818D-B41B2C4843CF}" type="datetimeFigureOut">
               <a:rPr lang="en-IN" smtClean="0"/>
-              <a:t>06-03-2026</a:t>
+              <a:t>04-04-2026</a:t>
             </a:fld>
             <a:endParaRPr lang="en-IN"/>
           </a:p>
@@ -1991,7 +1991,7 @@
           <a:p>
             <a:fld id="{F4AA89A1-F17A-4D3D-AC08-D16056C16514}" type="datetimeFigureOut">
               <a:rPr lang="en-IN" smtClean="0"/>
-              <a:t>06-03-2026</a:t>
+              <a:t>04-04-2026</a:t>
             </a:fld>
             <a:endParaRPr lang="en-IN"/>
           </a:p>
@@ -2161,7 +2161,7 @@
           <a:p>
             <a:fld id="{F4AA89A1-F17A-4D3D-AC08-D16056C16514}" type="datetimeFigureOut">
               <a:rPr lang="en-IN" smtClean="0"/>
-              <a:t>06-03-2026</a:t>
+              <a:t>04-04-2026</a:t>
             </a:fld>
             <a:endParaRPr lang="en-IN"/>
           </a:p>
@@ -2341,7 +2341,7 @@
           <a:p>
             <a:fld id="{F4AA89A1-F17A-4D3D-AC08-D16056C16514}" type="datetimeFigureOut">
               <a:rPr lang="en-IN" smtClean="0"/>
-              <a:t>06-03-2026</a:t>
+              <a:t>04-04-2026</a:t>
             </a:fld>
             <a:endParaRPr lang="en-IN"/>
           </a:p>
@@ -2511,7 +2511,7 @@
           <a:p>
             <a:fld id="{F4AA89A1-F17A-4D3D-AC08-D16056C16514}" type="datetimeFigureOut">
               <a:rPr lang="en-IN" smtClean="0"/>
-              <a:t>06-03-2026</a:t>
+              <a:t>04-04-2026</a:t>
             </a:fld>
             <a:endParaRPr lang="en-IN"/>
           </a:p>
@@ -2757,7 +2757,7 @@
           <a:p>
             <a:fld id="{F4AA89A1-F17A-4D3D-AC08-D16056C16514}" type="datetimeFigureOut">
               <a:rPr lang="en-IN" smtClean="0"/>
-              <a:t>06-03-2026</a:t>
+              <a:t>04-04-2026</a:t>
             </a:fld>
             <a:endParaRPr lang="en-IN"/>
           </a:p>
@@ -3045,7 +3045,7 @@
           <a:p>
             <a:fld id="{F4AA89A1-F17A-4D3D-AC08-D16056C16514}" type="datetimeFigureOut">
               <a:rPr lang="en-IN" smtClean="0"/>
-              <a:t>06-03-2026</a:t>
+              <a:t>04-04-2026</a:t>
             </a:fld>
             <a:endParaRPr lang="en-IN"/>
           </a:p>
@@ -3467,7 +3467,7 @@
           <a:p>
             <a:fld id="{F4AA89A1-F17A-4D3D-AC08-D16056C16514}" type="datetimeFigureOut">
               <a:rPr lang="en-IN" smtClean="0"/>
-              <a:t>06-03-2026</a:t>
+              <a:t>04-04-2026</a:t>
             </a:fld>
             <a:endParaRPr lang="en-IN"/>
           </a:p>
@@ -3585,7 +3585,7 @@
           <a:p>
             <a:fld id="{F4AA89A1-F17A-4D3D-AC08-D16056C16514}" type="datetimeFigureOut">
               <a:rPr lang="en-IN" smtClean="0"/>
-              <a:t>06-03-2026</a:t>
+              <a:t>04-04-2026</a:t>
             </a:fld>
             <a:endParaRPr lang="en-IN"/>
           </a:p>
@@ -3680,7 +3680,7 @@
           <a:p>
             <a:fld id="{F4AA89A1-F17A-4D3D-AC08-D16056C16514}" type="datetimeFigureOut">
               <a:rPr lang="en-IN" smtClean="0"/>
-              <a:t>06-03-2026</a:t>
+              <a:t>04-04-2026</a:t>
             </a:fld>
             <a:endParaRPr lang="en-IN"/>
           </a:p>
@@ -3957,7 +3957,7 @@
           <a:p>
             <a:fld id="{F4AA89A1-F17A-4D3D-AC08-D16056C16514}" type="datetimeFigureOut">
               <a:rPr lang="en-IN" smtClean="0"/>
-              <a:t>06-03-2026</a:t>
+              <a:t>04-04-2026</a:t>
             </a:fld>
             <a:endParaRPr lang="en-IN"/>
           </a:p>
@@ -4210,7 +4210,7 @@
           <a:p>
             <a:fld id="{F4AA89A1-F17A-4D3D-AC08-D16056C16514}" type="datetimeFigureOut">
               <a:rPr lang="en-IN" smtClean="0"/>
-              <a:t>06-03-2026</a:t>
+              <a:t>04-04-2026</a:t>
             </a:fld>
             <a:endParaRPr lang="en-IN"/>
           </a:p>
@@ -4423,7 +4423,7 @@
           <a:p>
             <a:fld id="{F4AA89A1-F17A-4D3D-AC08-D16056C16514}" type="datetimeFigureOut">
               <a:rPr lang="en-IN" smtClean="0"/>
-              <a:t>06-03-2026</a:t>
+              <a:t>04-04-2026</a:t>
             </a:fld>
             <a:endParaRPr lang="en-IN"/>
           </a:p>
@@ -6540,7 +6540,7 @@
         </p:blipFill>
         <p:spPr>
           <a:xfrm>
-            <a:off x="1" y="0"/>
+            <a:off x="22541" y="-27384"/>
             <a:ext cx="9180512" cy="6885384"/>
           </a:xfrm>
         </p:spPr>
@@ -6765,8 +6765,8 @@
         </p:nvSpPr>
         <p:spPr>
           <a:xfrm>
-            <a:off x="66806" y="2150030"/>
-            <a:ext cx="8784976" cy="2585323"/>
+            <a:off x="39900" y="1293834"/>
+            <a:ext cx="8784976" cy="3693319"/>
           </a:xfrm>
           <a:prstGeom prst="rect">
             <a:avLst/>
@@ -6779,83 +6779,98 @@
           </a:bodyPr>
           <a:lstStyle/>
           <a:p>
-            <a:pPr marL="285750" indent="-285750">
-              <a:buFont typeface="Arial" panose="020B0604020202020204" pitchFamily="34" charset="0"/>
-              <a:buChar char="•"/>
-            </a:pPr>
+            <a:r>
+              <a:rPr lang="en-IN" b="1" dirty="0"/>
+              <a:t>Choosing the Right Algorithm:</a:t>
+            </a:r>
+            <a:br>
+              <a:rPr lang="en-IN" dirty="0"/>
+            </a:br>
+            <a:br>
+              <a:rPr lang="en-IN" dirty="0"/>
+            </a:br>
+            <a:r>
+              <a:rPr lang="en-US" b="1" dirty="0"/>
+              <a:t>Fixed Window</a:t>
+            </a:r>
             <a:r>
               <a:rPr lang="en-US" dirty="0"/>
-              <a:t>Ensure stable and controlled API traffic during high-load conditions.</a:t>
-            </a:r>
-          </a:p>
-          <a:p>
-            <a:pPr marL="285750" indent="-285750">
-              <a:buFont typeface="Arial" panose="020B0604020202020204" pitchFamily="34" charset="0"/>
-              <a:buChar char="•"/>
-            </a:pPr>
-            <a:endParaRPr lang="en-US" dirty="0"/>
-          </a:p>
-          <a:p>
-            <a:pPr marL="285750" indent="-285750">
-              <a:buFont typeface="Arial" panose="020B0604020202020204" pitchFamily="34" charset="0"/>
-              <a:buChar char="•"/>
-            </a:pPr>
+              <a:t> :Simple but allows burst at boundaries </a:t>
+            </a:r>
+          </a:p>
+          <a:p>
+            <a:r>
+              <a:rPr lang="en-US" b="1" dirty="0"/>
+              <a:t>Sliding Window</a:t>
+            </a:r>
             <a:r>
               <a:rPr lang="en-US" dirty="0"/>
-              <a:t>Prevent API abuse, spam requests, and malicious traffic.</a:t>
-            </a:r>
-          </a:p>
-          <a:p>
-            <a:pPr marL="285750" indent="-285750">
-              <a:buFont typeface="Arial" panose="020B0604020202020204" pitchFamily="34" charset="0"/>
-              <a:buChar char="•"/>
-            </a:pPr>
-            <a:endParaRPr lang="en-US" dirty="0"/>
-          </a:p>
-          <a:p>
-            <a:pPr marL="285750" indent="-285750">
-              <a:buFont typeface="Arial" panose="020B0604020202020204" pitchFamily="34" charset="0"/>
-              <a:buChar char="•"/>
-            </a:pPr>
+              <a:t> :More accurate but computationally expensive </a:t>
+            </a:r>
+          </a:p>
+          <a:p>
+            <a:r>
+              <a:rPr lang="en-US" b="1" dirty="0"/>
+              <a:t>Token Bucket</a:t>
+            </a:r>
             <a:r>
               <a:rPr lang="en-US" dirty="0"/>
-              <a:t>Maintain consistent rate limiting across distributed servers.</a:t>
-            </a:r>
-          </a:p>
-          <a:p>
-            <a:pPr marL="285750" indent="-285750">
-              <a:buFont typeface="Arial" panose="020B0604020202020204" pitchFamily="34" charset="0"/>
-              <a:buChar char="•"/>
-            </a:pPr>
-            <a:endParaRPr lang="en-US" dirty="0"/>
-          </a:p>
-          <a:p>
-            <a:pPr marL="285750" indent="-285750">
-              <a:buFont typeface="Arial" panose="020B0604020202020204" pitchFamily="34" charset="0"/>
-              <a:buChar char="•"/>
-            </a:pPr>
+              <a:t> :Allows controlled bursts, widely used </a:t>
+            </a:r>
+          </a:p>
+          <a:p>
+            <a:r>
+              <a:rPr lang="en-US" b="1" dirty="0"/>
+              <a:t>Leaky Bucket</a:t>
+            </a:r>
             <a:r>
               <a:rPr lang="en-US" dirty="0"/>
-              <a:t>Improve system performance and reduce server overload.</a:t>
-            </a:r>
-          </a:p>
-          <a:p>
-            <a:pPr marL="285750" indent="-285750">
-              <a:buFont typeface="Arial" panose="020B0604020202020204" pitchFamily="34" charset="0"/>
-              <a:buChar char="•"/>
-            </a:pPr>
-            <a:endParaRPr lang="en-US" dirty="0"/>
-          </a:p>
-          <a:p>
-            <a:pPr marL="285750" indent="-285750">
-              <a:buFont typeface="Arial" panose="020B0604020202020204" pitchFamily="34" charset="0"/>
-              <a:buChar char="•"/>
-            </a:pPr>
-            <a:r>
+              <a:t> :Smooth traffic but less flexible</a:t>
+            </a:r>
+          </a:p>
+          <a:p>
+            <a:endParaRPr lang="en-IN" dirty="0"/>
+          </a:p>
+          <a:p>
+            <a:r>
+              <a:rPr lang="en-IN" b="1" dirty="0"/>
+              <a:t>Solution:</a:t>
+            </a:r>
+            <a:r>
+              <a:rPr lang="en-US" b="1" dirty="0"/>
+              <a:t>Why Choose Sliding Window Algorithm:</a:t>
+            </a:r>
+            <a:br>
+              <a:rPr lang="en-US" b="1" dirty="0"/>
+            </a:br>
+            <a:br>
               <a:rPr lang="en-US" dirty="0"/>
-              <a:t>Enhance overall system reliability, security, and scalability.</a:t>
-            </a:r>
-            <a:endParaRPr lang="en-IN" dirty="0"/>
+            </a:br>
+            <a:r>
+              <a:rPr lang="en-IN" dirty="0"/>
+              <a:t>Eliminates Boundary Burst Problem</a:t>
+            </a:r>
+            <a:br>
+              <a:rPr lang="en-IN" dirty="0"/>
+            </a:br>
+            <a:r>
+              <a:rPr lang="en-IN" dirty="0"/>
+              <a:t>Better Accuracy</a:t>
+            </a:r>
+            <a:br>
+              <a:rPr lang="en-IN" dirty="0"/>
+            </a:br>
+            <a:r>
+              <a:rPr lang="en-IN" dirty="0"/>
+              <a:t>Improved Fairness</a:t>
+            </a:r>
+            <a:br>
+              <a:rPr lang="en-IN" dirty="0"/>
+            </a:br>
+            <a:r>
+              <a:rPr lang="en-IN" dirty="0"/>
+              <a:t>Smooth Traffic Control</a:t>
+            </a:r>
           </a:p>
         </p:txBody>
       </p:sp>
